--- a/slides/lab 3.pptx
+++ b/slides/lab 3.pptx
@@ -11,10 +11,11 @@
     <p:sldId id="273" r:id="rId5"/>
     <p:sldId id="274" r:id="rId6"/>
     <p:sldId id="275" r:id="rId7"/>
-    <p:sldId id="276" r:id="rId8"/>
-    <p:sldId id="277" r:id="rId9"/>
-    <p:sldId id="278" r:id="rId10"/>
-    <p:sldId id="270" r:id="rId11"/>
+    <p:sldId id="279" r:id="rId8"/>
+    <p:sldId id="276" r:id="rId9"/>
+    <p:sldId id="277" r:id="rId10"/>
+    <p:sldId id="278" r:id="rId11"/>
+    <p:sldId id="270" r:id="rId12"/>
   </p:sldIdLst>
   <p:sldSz cx="12192000" cy="6858000"/>
   <p:notesSz cx="6858000" cy="9144000"/>
@@ -3434,6 +3435,265 @@
   <p:cSld>
     <p:spTree>
       <p:nvGrpSpPr>
+        <p:cNvPr id="1" name="">
+          <a:extLst>
+            <a:ext uri="{FF2B5EF4-FFF2-40B4-BE49-F238E27FC236}">
+              <a16:creationId xmlns:a16="http://schemas.microsoft.com/office/drawing/2014/main" id="{F6EBEF63-AA7F-30B6-2B3A-75456ED30906}"/>
+            </a:ext>
+          </a:extLst>
+        </p:cNvPr>
+        <p:cNvGrpSpPr/>
+        <p:nvPr/>
+      </p:nvGrpSpPr>
+      <p:grpSpPr>
+        <a:xfrm>
+          <a:off x="0" y="0"/>
+          <a:ext cx="0" cy="0"/>
+          <a:chOff x="0" y="0"/>
+          <a:chExt cx="0" cy="0"/>
+        </a:xfrm>
+      </p:grpSpPr>
+      <p:sp>
+        <p:nvSpPr>
+          <p:cNvPr id="2" name="Заголовок 1">
+            <a:extLst>
+              <a:ext uri="{FF2B5EF4-FFF2-40B4-BE49-F238E27FC236}">
+                <a16:creationId xmlns:a16="http://schemas.microsoft.com/office/drawing/2014/main" id="{6D4F26CA-AE86-10F8-9DEA-950E862BFE23}"/>
+              </a:ext>
+            </a:extLst>
+          </p:cNvPr>
+          <p:cNvSpPr>
+            <a:spLocks noGrp="1"/>
+          </p:cNvSpPr>
+          <p:nvPr>
+            <p:ph type="title"/>
+          </p:nvPr>
+        </p:nvSpPr>
+        <p:spPr/>
+        <p:txBody>
+          <a:bodyPr/>
+          <a:lstStyle/>
+          <a:p>
+            <a:r>
+              <a:rPr lang="ru-RU" b="1" dirty="0">
+                <a:solidFill>
+                  <a:schemeClr val="accent1">
+                    <a:lumMod val="75000"/>
+                  </a:schemeClr>
+                </a:solidFill>
+              </a:rPr>
+              <a:t>4. Финал</a:t>
+            </a:r>
+          </a:p>
+        </p:txBody>
+      </p:sp>
+      <p:sp>
+        <p:nvSpPr>
+          <p:cNvPr id="3" name="Объект 2">
+            <a:extLst>
+              <a:ext uri="{FF2B5EF4-FFF2-40B4-BE49-F238E27FC236}">
+                <a16:creationId xmlns:a16="http://schemas.microsoft.com/office/drawing/2014/main" id="{7FE7A85D-5D6F-BDA4-7C35-95D25702A05E}"/>
+              </a:ext>
+            </a:extLst>
+          </p:cNvPr>
+          <p:cNvSpPr>
+            <a:spLocks noGrp="1"/>
+          </p:cNvSpPr>
+          <p:nvPr>
+            <p:ph idx="1"/>
+          </p:nvPr>
+        </p:nvSpPr>
+        <p:spPr>
+          <a:xfrm>
+            <a:off x="838200" y="1545335"/>
+            <a:ext cx="10515600" cy="5166361"/>
+          </a:xfrm>
+        </p:spPr>
+        <p:txBody>
+          <a:bodyPr>
+            <a:normAutofit/>
+          </a:bodyPr>
+          <a:lstStyle/>
+          <a:p>
+            <a:pPr marL="514350" indent="-514350">
+              <a:buFont typeface="+mj-lt"/>
+              <a:buAutoNum type="arabicParenR"/>
+            </a:pPr>
+            <a:r>
+              <a:rPr lang="ru-RU" dirty="0"/>
+              <a:t>Обновить стенд </a:t>
+            </a:r>
+            <a:r>
+              <a:rPr lang="en-US" dirty="0"/>
+              <a:t>values</a:t>
+            </a:r>
+            <a:r>
+              <a:rPr lang="ru-RU" dirty="0"/>
+              <a:t> (предварительно его не изучая):</a:t>
+            </a:r>
+            <a:br>
+              <a:rPr lang="ru-RU" dirty="0"/>
+            </a:br>
+            <a:r>
+              <a:rPr lang="ru-RU" dirty="0" err="1"/>
+              <a:t>helm</a:t>
+            </a:r>
+            <a:r>
+              <a:rPr lang="ru-RU" dirty="0"/>
+              <a:t> </a:t>
+            </a:r>
+            <a:r>
+              <a:rPr lang="ru-RU" dirty="0" err="1"/>
+              <a:t>upgrade</a:t>
+            </a:r>
+            <a:r>
+              <a:rPr lang="en-US" dirty="0"/>
+              <a:t> bonus-app</a:t>
+            </a:r>
+            <a:r>
+              <a:rPr lang="ru-RU" dirty="0"/>
+              <a:t> . -f </a:t>
+            </a:r>
+            <a:r>
+              <a:rPr lang="en-US" dirty="0" err="1"/>
+              <a:t>values.yaml</a:t>
+            </a:r>
+            <a:r>
+              <a:rPr lang="ru-RU" dirty="0"/>
+              <a:t> -f values-6.yaml -n </a:t>
+            </a:r>
+            <a:r>
+              <a:rPr lang="en-US" dirty="0"/>
+              <a:t>bonus</a:t>
+            </a:r>
+            <a:r>
+              <a:rPr lang="ru-RU" dirty="0"/>
+              <a:t> (</a:t>
+            </a:r>
+            <a:r>
+              <a:rPr lang="ru-RU" b="1" dirty="0"/>
+              <a:t>из каталога с </a:t>
+            </a:r>
+            <a:r>
+              <a:rPr lang="en-US" b="1" dirty="0"/>
+              <a:t>values</a:t>
+            </a:r>
+            <a:r>
+              <a:rPr lang="en-US" dirty="0"/>
+              <a:t>)</a:t>
+            </a:r>
+            <a:endParaRPr lang="ru-RU" dirty="0"/>
+          </a:p>
+          <a:p>
+            <a:pPr marL="514350" indent="-514350">
+              <a:buFont typeface="+mj-lt"/>
+              <a:buAutoNum type="arabicParenR"/>
+            </a:pPr>
+            <a:r>
+              <a:rPr lang="ru-RU" dirty="0"/>
+              <a:t>Проверить результат: </a:t>
+            </a:r>
+            <a:r>
+              <a:rPr lang="en-US" dirty="0">
+                <a:hlinkClick r:id="rId2"/>
+              </a:rPr>
+              <a:t>http://iwannabonuses.local</a:t>
+            </a:r>
+            <a:r>
+              <a:rPr lang="en-US" dirty="0"/>
+              <a:t>/</a:t>
+            </a:r>
+            <a:endParaRPr lang="ru-RU" dirty="0"/>
+          </a:p>
+        </p:txBody>
+      </p:sp>
+      <p:graphicFrame>
+        <p:nvGraphicFramePr>
+          <p:cNvPr id="4" name="Объект 3">
+            <a:extLst>
+              <a:ext uri="{FF2B5EF4-FFF2-40B4-BE49-F238E27FC236}">
+                <a16:creationId xmlns:a16="http://schemas.microsoft.com/office/drawing/2014/main" id="{A8382A9E-4147-46A1-9C8F-54A1DA693185}"/>
+              </a:ext>
+            </a:extLst>
+          </p:cNvPr>
+          <p:cNvGraphicFramePr>
+            <a:graphicFrameLocks noChangeAspect="1"/>
+          </p:cNvGraphicFramePr>
+          <p:nvPr>
+            <p:extLst>
+              <p:ext uri="{D42A27DB-BD31-4B8C-83A1-F6EECF244321}">
+                <p14:modId xmlns:p14="http://schemas.microsoft.com/office/powerpoint/2010/main" val="2668490023"/>
+              </p:ext>
+            </p:extLst>
+          </p:nvPr>
+        </p:nvGraphicFramePr>
+        <p:xfrm>
+          <a:off x="10353675" y="513556"/>
+          <a:ext cx="1000125" cy="514350"/>
+        </p:xfrm>
+        <a:graphic>
+          <a:graphicData uri="http://schemas.openxmlformats.org/presentationml/2006/ole">
+            <mc:AlternateContent xmlns:mc="http://schemas.openxmlformats.org/markup-compatibility/2006">
+              <mc:Choice xmlns:v="urn:schemas-microsoft-com:vml" Requires="v">
+                <p:oleObj name="Объект упаковщика для оболочки" showAsIcon="1" r:id="rId3" imgW="999992" imgH="514350" progId="Package">
+                  <p:embed/>
+                </p:oleObj>
+              </mc:Choice>
+              <mc:Fallback>
+                <p:oleObj name="Объект упаковщика для оболочки" showAsIcon="1" r:id="rId3" imgW="999992" imgH="514350" progId="Package">
+                  <p:embed/>
+                  <p:pic>
+                    <p:nvPicPr>
+                      <p:cNvPr id="0" name=""/>
+                      <p:cNvPicPr/>
+                      <p:nvPr/>
+                    </p:nvPicPr>
+                    <p:blipFill>
+                      <a:blip r:embed="rId4"/>
+                      <a:stretch>
+                        <a:fillRect/>
+                      </a:stretch>
+                    </p:blipFill>
+                    <p:spPr>
+                      <a:xfrm>
+                        <a:off x="10353675" y="513556"/>
+                        <a:ext cx="1000125" cy="514350"/>
+                      </a:xfrm>
+                      <a:prstGeom prst="rect">
+                        <a:avLst/>
+                      </a:prstGeom>
+                      <a:solidFill>
+                        <a:schemeClr val="accent1">
+                          <a:lumMod val="20000"/>
+                          <a:lumOff val="80000"/>
+                        </a:schemeClr>
+                      </a:solidFill>
+                    </p:spPr>
+                  </p:pic>
+                </p:oleObj>
+              </mc:Fallback>
+            </mc:AlternateContent>
+          </a:graphicData>
+        </a:graphic>
+      </p:graphicFrame>
+    </p:spTree>
+    <p:extLst>
+      <p:ext uri="{BB962C8B-B14F-4D97-AF65-F5344CB8AC3E}">
+        <p14:creationId xmlns:p14="http://schemas.microsoft.com/office/powerpoint/2010/main" val="2069047387"/>
+      </p:ext>
+    </p:extLst>
+  </p:cSld>
+  <p:clrMapOvr>
+    <a:masterClrMapping/>
+  </p:clrMapOvr>
+</p:sld>
+</file>
+
+<file path=ppt/slides/slide11.xml><?xml version="1.0" encoding="utf-8"?>
+<p:sld xmlns:a="http://schemas.openxmlformats.org/drawingml/2006/main" xmlns:r="http://schemas.openxmlformats.org/officeDocument/2006/relationships" xmlns:p="http://schemas.openxmlformats.org/presentationml/2006/main">
+  <p:cSld>
+    <p:spTree>
+      <p:nvGrpSpPr>
         <p:cNvPr id="1" name=""/>
         <p:cNvGrpSpPr/>
         <p:nvPr/>
@@ -5802,6 +6062,259 @@
         <p:cNvPr id="1" name="">
           <a:extLst>
             <a:ext uri="{FF2B5EF4-FFF2-40B4-BE49-F238E27FC236}">
+              <a16:creationId xmlns:a16="http://schemas.microsoft.com/office/drawing/2014/main" id="{A09D3BF3-D3A0-8039-111A-7F70C96B15B3}"/>
+            </a:ext>
+          </a:extLst>
+        </p:cNvPr>
+        <p:cNvGrpSpPr/>
+        <p:nvPr/>
+      </p:nvGrpSpPr>
+      <p:grpSpPr>
+        <a:xfrm>
+          <a:off x="0" y="0"/>
+          <a:ext cx="0" cy="0"/>
+          <a:chOff x="0" y="0"/>
+          <a:chExt cx="0" cy="0"/>
+        </a:xfrm>
+      </p:grpSpPr>
+      <p:sp>
+        <p:nvSpPr>
+          <p:cNvPr id="2" name="Заголовок 1">
+            <a:extLst>
+              <a:ext uri="{FF2B5EF4-FFF2-40B4-BE49-F238E27FC236}">
+                <a16:creationId xmlns:a16="http://schemas.microsoft.com/office/drawing/2014/main" id="{898747BC-B092-373C-48BB-914648C6E313}"/>
+              </a:ext>
+            </a:extLst>
+          </p:cNvPr>
+          <p:cNvSpPr>
+            <a:spLocks noGrp="1"/>
+          </p:cNvSpPr>
+          <p:nvPr>
+            <p:ph type="title"/>
+          </p:nvPr>
+        </p:nvSpPr>
+        <p:spPr/>
+        <p:txBody>
+          <a:bodyPr/>
+          <a:lstStyle/>
+          <a:p>
+            <a:r>
+              <a:rPr lang="ru-RU" b="1" dirty="0">
+                <a:solidFill>
+                  <a:schemeClr val="accent1">
+                    <a:lumMod val="75000"/>
+                  </a:schemeClr>
+                </a:solidFill>
+              </a:rPr>
+              <a:t>3.3. Поиск ошибок. Третья.</a:t>
+            </a:r>
+          </a:p>
+        </p:txBody>
+      </p:sp>
+      <p:sp>
+        <p:nvSpPr>
+          <p:cNvPr id="3" name="Объект 2">
+            <a:extLst>
+              <a:ext uri="{FF2B5EF4-FFF2-40B4-BE49-F238E27FC236}">
+                <a16:creationId xmlns:a16="http://schemas.microsoft.com/office/drawing/2014/main" id="{8EFE0DEB-E78A-A913-4D77-EE3EEC7AD359}"/>
+              </a:ext>
+            </a:extLst>
+          </p:cNvPr>
+          <p:cNvSpPr>
+            <a:spLocks noGrp="1"/>
+          </p:cNvSpPr>
+          <p:nvPr>
+            <p:ph idx="1"/>
+          </p:nvPr>
+        </p:nvSpPr>
+        <p:spPr>
+          <a:xfrm>
+            <a:off x="838200" y="1545335"/>
+            <a:ext cx="10515600" cy="5166361"/>
+          </a:xfrm>
+        </p:spPr>
+        <p:txBody>
+          <a:bodyPr>
+            <a:normAutofit lnSpcReduction="10000"/>
+          </a:bodyPr>
+          <a:lstStyle/>
+          <a:p>
+            <a:pPr marL="0" indent="0">
+              <a:buNone/>
+            </a:pPr>
+            <a:r>
+              <a:rPr lang="ru-RU" dirty="0"/>
+              <a:t>В некоторых случаях </a:t>
+            </a:r>
+            <a:r>
+              <a:rPr lang="ru-RU" b="1" dirty="0" err="1"/>
+              <a:t>Pod</a:t>
+            </a:r>
+            <a:r>
+              <a:rPr lang="ru-RU" b="1" dirty="0"/>
+              <a:t> будет </a:t>
+            </a:r>
+            <a:r>
+              <a:rPr lang="ru-RU" b="1" dirty="0" err="1"/>
+              <a:t>Running</a:t>
+            </a:r>
+            <a:r>
+              <a:rPr lang="ru-RU" dirty="0"/>
+              <a:t>, а ответ найдётся именно в логах, например:</a:t>
+            </a:r>
+          </a:p>
+          <a:p>
+            <a:r>
+              <a:rPr lang="ru-RU" dirty="0"/>
+              <a:t>приложение успешно запустилось, но не может подключиться к БД; </a:t>
+            </a:r>
+          </a:p>
+          <a:p>
+            <a:r>
+              <a:rPr lang="ru-RU" dirty="0"/>
+              <a:t>отсутствует обязательная переменная окружения; </a:t>
+            </a:r>
+          </a:p>
+          <a:p>
+            <a:r>
+              <a:rPr lang="ru-RU" dirty="0"/>
+              <a:t>неправильный URL внешнего API; </a:t>
+            </a:r>
+          </a:p>
+          <a:p>
+            <a:r>
+              <a:rPr lang="ru-RU" dirty="0"/>
+              <a:t>ошибка в конфигурации Spring/.NET; </a:t>
+            </a:r>
+          </a:p>
+          <a:p>
+            <a:r>
+              <a:rPr lang="ru-RU" dirty="0"/>
+              <a:t>приложение стартовало, а затем начало отдавать 500; </a:t>
+            </a:r>
+          </a:p>
+          <a:p>
+            <a:r>
+              <a:rPr lang="ru-RU" dirty="0" err="1"/>
+              <a:t>liveness</a:t>
+            </a:r>
+            <a:r>
+              <a:rPr lang="ru-RU" dirty="0"/>
+              <a:t>/</a:t>
+            </a:r>
+            <a:r>
+              <a:rPr lang="ru-RU" dirty="0" err="1"/>
+              <a:t>readiness</a:t>
+            </a:r>
+            <a:r>
+              <a:rPr lang="ru-RU" dirty="0"/>
+              <a:t> настроены так, что </a:t>
+            </a:r>
+            <a:r>
+              <a:rPr lang="ru-RU" dirty="0" err="1"/>
+              <a:t>Pod</a:t>
+            </a:r>
+            <a:r>
+              <a:rPr lang="ru-RU" dirty="0"/>
+              <a:t> остаётся </a:t>
+            </a:r>
+            <a:r>
+              <a:rPr lang="ru-RU" dirty="0" err="1"/>
+              <a:t>Running</a:t>
+            </a:r>
+            <a:r>
+              <a:rPr lang="ru-RU" dirty="0"/>
+              <a:t>, но сервис фактически не работает;</a:t>
+            </a:r>
+          </a:p>
+          <a:p>
+            <a:r>
+              <a:rPr lang="ru-RU"/>
+              <a:t>…</a:t>
+            </a:r>
+            <a:endParaRPr lang="ru-RU" dirty="0"/>
+          </a:p>
+          <a:p>
+            <a:pPr marL="0" indent="0">
+              <a:buNone/>
+            </a:pPr>
+            <a:endParaRPr lang="ru-RU" dirty="0">
+              <a:sym typeface="Wingdings" panose="05000000000000000000" pitchFamily="2" charset="2"/>
+            </a:endParaRPr>
+          </a:p>
+        </p:txBody>
+      </p:sp>
+      <p:sp>
+        <p:nvSpPr>
+          <p:cNvPr id="5" name="TextBox 4">
+            <a:extLst>
+              <a:ext uri="{FF2B5EF4-FFF2-40B4-BE49-F238E27FC236}">
+                <a16:creationId xmlns:a16="http://schemas.microsoft.com/office/drawing/2014/main" id="{BECF60FB-5AC7-AB1D-4447-7012FCC322A7}"/>
+              </a:ext>
+            </a:extLst>
+          </p:cNvPr>
+          <p:cNvSpPr txBox="1"/>
+          <p:nvPr/>
+        </p:nvSpPr>
+        <p:spPr>
+          <a:xfrm>
+            <a:off x="10067544" y="6342364"/>
+            <a:ext cx="968535" cy="369332"/>
+          </a:xfrm>
+          <a:prstGeom prst="rect">
+            <a:avLst/>
+          </a:prstGeom>
+          <a:noFill/>
+        </p:spPr>
+        <p:txBody>
+          <a:bodyPr wrap="none" rtlCol="0">
+            <a:spAutoFit/>
+          </a:bodyPr>
+          <a:lstStyle/>
+          <a:p>
+            <a:r>
+              <a:rPr lang="en-US" dirty="0">
+                <a:solidFill>
+                  <a:schemeClr val="accent1">
+                    <a:lumMod val="60000"/>
+                    <a:lumOff val="40000"/>
+                  </a:schemeClr>
+                </a:solidFill>
+              </a:rPr>
+              <a:t>Bad logs</a:t>
+            </a:r>
+            <a:endParaRPr lang="ru-RU" dirty="0">
+              <a:solidFill>
+                <a:schemeClr val="accent1">
+                  <a:lumMod val="60000"/>
+                  <a:lumOff val="40000"/>
+                </a:schemeClr>
+              </a:solidFill>
+            </a:endParaRPr>
+          </a:p>
+        </p:txBody>
+      </p:sp>
+    </p:spTree>
+    <p:extLst>
+      <p:ext uri="{BB962C8B-B14F-4D97-AF65-F5344CB8AC3E}">
+        <p14:creationId xmlns:p14="http://schemas.microsoft.com/office/powerpoint/2010/main" val="603654174"/>
+      </p:ext>
+    </p:extLst>
+  </p:cSld>
+  <p:clrMapOvr>
+    <a:masterClrMapping/>
+  </p:clrMapOvr>
+</p:sld>
+</file>
+
+<file path=ppt/slides/slide8.xml><?xml version="1.0" encoding="utf-8"?>
+<p:sld xmlns:a="http://schemas.openxmlformats.org/drawingml/2006/main" xmlns:r="http://schemas.openxmlformats.org/officeDocument/2006/relationships" xmlns:p="http://schemas.openxmlformats.org/presentationml/2006/main">
+  <p:cSld>
+    <p:spTree>
+      <p:nvGrpSpPr>
+        <p:cNvPr id="1" name="">
+          <a:extLst>
+            <a:ext uri="{FF2B5EF4-FFF2-40B4-BE49-F238E27FC236}">
               <a16:creationId xmlns:a16="http://schemas.microsoft.com/office/drawing/2014/main" id="{C54B654F-6701-464D-BBCA-A04FA7DB648E}"/>
             </a:ext>
           </a:extLst>
@@ -6174,7 +6687,7 @@
 </p:sld>
 </file>
 
-<file path=ppt/slides/slide8.xml><?xml version="1.0" encoding="utf-8"?>
+<file path=ppt/slides/slide9.xml><?xml version="1.0" encoding="utf-8"?>
 <p:sld xmlns:a="http://schemas.openxmlformats.org/drawingml/2006/main" xmlns:r="http://schemas.openxmlformats.org/officeDocument/2006/relationships" xmlns:p="http://schemas.openxmlformats.org/presentationml/2006/main">
   <p:cSld>
     <p:spTree>
@@ -6615,265 +7128,6 @@
     <p:extLst>
       <p:ext uri="{BB962C8B-B14F-4D97-AF65-F5344CB8AC3E}">
         <p14:creationId xmlns:p14="http://schemas.microsoft.com/office/powerpoint/2010/main" val="3866576722"/>
-      </p:ext>
-    </p:extLst>
-  </p:cSld>
-  <p:clrMapOvr>
-    <a:masterClrMapping/>
-  </p:clrMapOvr>
-</p:sld>
-</file>
-
-<file path=ppt/slides/slide9.xml><?xml version="1.0" encoding="utf-8"?>
-<p:sld xmlns:a="http://schemas.openxmlformats.org/drawingml/2006/main" xmlns:r="http://schemas.openxmlformats.org/officeDocument/2006/relationships" xmlns:p="http://schemas.openxmlformats.org/presentationml/2006/main">
-  <p:cSld>
-    <p:spTree>
-      <p:nvGrpSpPr>
-        <p:cNvPr id="1" name="">
-          <a:extLst>
-            <a:ext uri="{FF2B5EF4-FFF2-40B4-BE49-F238E27FC236}">
-              <a16:creationId xmlns:a16="http://schemas.microsoft.com/office/drawing/2014/main" id="{F6EBEF63-AA7F-30B6-2B3A-75456ED30906}"/>
-            </a:ext>
-          </a:extLst>
-        </p:cNvPr>
-        <p:cNvGrpSpPr/>
-        <p:nvPr/>
-      </p:nvGrpSpPr>
-      <p:grpSpPr>
-        <a:xfrm>
-          <a:off x="0" y="0"/>
-          <a:ext cx="0" cy="0"/>
-          <a:chOff x="0" y="0"/>
-          <a:chExt cx="0" cy="0"/>
-        </a:xfrm>
-      </p:grpSpPr>
-      <p:sp>
-        <p:nvSpPr>
-          <p:cNvPr id="2" name="Заголовок 1">
-            <a:extLst>
-              <a:ext uri="{FF2B5EF4-FFF2-40B4-BE49-F238E27FC236}">
-                <a16:creationId xmlns:a16="http://schemas.microsoft.com/office/drawing/2014/main" id="{6D4F26CA-AE86-10F8-9DEA-950E862BFE23}"/>
-              </a:ext>
-            </a:extLst>
-          </p:cNvPr>
-          <p:cNvSpPr>
-            <a:spLocks noGrp="1"/>
-          </p:cNvSpPr>
-          <p:nvPr>
-            <p:ph type="title"/>
-          </p:nvPr>
-        </p:nvSpPr>
-        <p:spPr/>
-        <p:txBody>
-          <a:bodyPr/>
-          <a:lstStyle/>
-          <a:p>
-            <a:r>
-              <a:rPr lang="ru-RU" b="1" dirty="0">
-                <a:solidFill>
-                  <a:schemeClr val="accent1">
-                    <a:lumMod val="75000"/>
-                  </a:schemeClr>
-                </a:solidFill>
-              </a:rPr>
-              <a:t>4. Финал</a:t>
-            </a:r>
-          </a:p>
-        </p:txBody>
-      </p:sp>
-      <p:sp>
-        <p:nvSpPr>
-          <p:cNvPr id="3" name="Объект 2">
-            <a:extLst>
-              <a:ext uri="{FF2B5EF4-FFF2-40B4-BE49-F238E27FC236}">
-                <a16:creationId xmlns:a16="http://schemas.microsoft.com/office/drawing/2014/main" id="{7FE7A85D-5D6F-BDA4-7C35-95D25702A05E}"/>
-              </a:ext>
-            </a:extLst>
-          </p:cNvPr>
-          <p:cNvSpPr>
-            <a:spLocks noGrp="1"/>
-          </p:cNvSpPr>
-          <p:nvPr>
-            <p:ph idx="1"/>
-          </p:nvPr>
-        </p:nvSpPr>
-        <p:spPr>
-          <a:xfrm>
-            <a:off x="838200" y="1545335"/>
-            <a:ext cx="10515600" cy="5166361"/>
-          </a:xfrm>
-        </p:spPr>
-        <p:txBody>
-          <a:bodyPr>
-            <a:normAutofit/>
-          </a:bodyPr>
-          <a:lstStyle/>
-          <a:p>
-            <a:pPr marL="514350" indent="-514350">
-              <a:buFont typeface="+mj-lt"/>
-              <a:buAutoNum type="arabicParenR"/>
-            </a:pPr>
-            <a:r>
-              <a:rPr lang="ru-RU" dirty="0"/>
-              <a:t>Обновить стенд </a:t>
-            </a:r>
-            <a:r>
-              <a:rPr lang="en-US" dirty="0"/>
-              <a:t>values</a:t>
-            </a:r>
-            <a:r>
-              <a:rPr lang="ru-RU" dirty="0"/>
-              <a:t> (предварительно его не изучая):</a:t>
-            </a:r>
-            <a:br>
-              <a:rPr lang="ru-RU" dirty="0"/>
-            </a:br>
-            <a:r>
-              <a:rPr lang="ru-RU" dirty="0" err="1"/>
-              <a:t>helm</a:t>
-            </a:r>
-            <a:r>
-              <a:rPr lang="ru-RU" dirty="0"/>
-              <a:t> </a:t>
-            </a:r>
-            <a:r>
-              <a:rPr lang="ru-RU" dirty="0" err="1"/>
-              <a:t>upgrade</a:t>
-            </a:r>
-            <a:r>
-              <a:rPr lang="en-US" dirty="0"/>
-              <a:t> bonus-app</a:t>
-            </a:r>
-            <a:r>
-              <a:rPr lang="ru-RU" dirty="0"/>
-              <a:t> . -f </a:t>
-            </a:r>
-            <a:r>
-              <a:rPr lang="en-US" dirty="0" err="1"/>
-              <a:t>values.yaml</a:t>
-            </a:r>
-            <a:r>
-              <a:rPr lang="ru-RU" dirty="0"/>
-              <a:t> -f values-6.yaml -n </a:t>
-            </a:r>
-            <a:r>
-              <a:rPr lang="en-US" dirty="0"/>
-              <a:t>bonus</a:t>
-            </a:r>
-            <a:r>
-              <a:rPr lang="ru-RU" dirty="0"/>
-              <a:t> (</a:t>
-            </a:r>
-            <a:r>
-              <a:rPr lang="ru-RU" b="1" dirty="0"/>
-              <a:t>из каталога с </a:t>
-            </a:r>
-            <a:r>
-              <a:rPr lang="en-US" b="1" dirty="0"/>
-              <a:t>values</a:t>
-            </a:r>
-            <a:r>
-              <a:rPr lang="en-US" dirty="0"/>
-              <a:t>)</a:t>
-            </a:r>
-            <a:endParaRPr lang="ru-RU" dirty="0"/>
-          </a:p>
-          <a:p>
-            <a:pPr marL="514350" indent="-514350">
-              <a:buFont typeface="+mj-lt"/>
-              <a:buAutoNum type="arabicParenR"/>
-            </a:pPr>
-            <a:r>
-              <a:rPr lang="ru-RU" dirty="0"/>
-              <a:t>Проверить результат: </a:t>
-            </a:r>
-            <a:r>
-              <a:rPr lang="en-US" dirty="0">
-                <a:hlinkClick r:id="rId2"/>
-              </a:rPr>
-              <a:t>http://iwannabonuses.local</a:t>
-            </a:r>
-            <a:r>
-              <a:rPr lang="en-US" dirty="0"/>
-              <a:t>/</a:t>
-            </a:r>
-            <a:endParaRPr lang="ru-RU" dirty="0"/>
-          </a:p>
-        </p:txBody>
-      </p:sp>
-      <p:graphicFrame>
-        <p:nvGraphicFramePr>
-          <p:cNvPr id="4" name="Объект 3">
-            <a:extLst>
-              <a:ext uri="{FF2B5EF4-FFF2-40B4-BE49-F238E27FC236}">
-                <a16:creationId xmlns:a16="http://schemas.microsoft.com/office/drawing/2014/main" id="{A8382A9E-4147-46A1-9C8F-54A1DA693185}"/>
-              </a:ext>
-            </a:extLst>
-          </p:cNvPr>
-          <p:cNvGraphicFramePr>
-            <a:graphicFrameLocks noChangeAspect="1"/>
-          </p:cNvGraphicFramePr>
-          <p:nvPr>
-            <p:extLst>
-              <p:ext uri="{D42A27DB-BD31-4B8C-83A1-F6EECF244321}">
-                <p14:modId xmlns:p14="http://schemas.microsoft.com/office/powerpoint/2010/main" val="2668490023"/>
-              </p:ext>
-            </p:extLst>
-          </p:nvPr>
-        </p:nvGraphicFramePr>
-        <p:xfrm>
-          <a:off x="10353675" y="513556"/>
-          <a:ext cx="1000125" cy="514350"/>
-        </p:xfrm>
-        <a:graphic>
-          <a:graphicData uri="http://schemas.openxmlformats.org/presentationml/2006/ole">
-            <mc:AlternateContent xmlns:mc="http://schemas.openxmlformats.org/markup-compatibility/2006">
-              <mc:Choice xmlns:v="urn:schemas-microsoft-com:vml" Requires="v">
-                <p:oleObj name="Объект упаковщика для оболочки" showAsIcon="1" r:id="rId3" imgW="999992" imgH="514350" progId="Package">
-                  <p:embed/>
-                </p:oleObj>
-              </mc:Choice>
-              <mc:Fallback>
-                <p:oleObj name="Объект упаковщика для оболочки" showAsIcon="1" r:id="rId3" imgW="999992" imgH="514350" progId="Package">
-                  <p:embed/>
-                  <p:pic>
-                    <p:nvPicPr>
-                      <p:cNvPr id="0" name=""/>
-                      <p:cNvPicPr/>
-                      <p:nvPr/>
-                    </p:nvPicPr>
-                    <p:blipFill>
-                      <a:blip r:embed="rId4"/>
-                      <a:stretch>
-                        <a:fillRect/>
-                      </a:stretch>
-                    </p:blipFill>
-                    <p:spPr>
-                      <a:xfrm>
-                        <a:off x="10353675" y="513556"/>
-                        <a:ext cx="1000125" cy="514350"/>
-                      </a:xfrm>
-                      <a:prstGeom prst="rect">
-                        <a:avLst/>
-                      </a:prstGeom>
-                      <a:solidFill>
-                        <a:schemeClr val="accent1">
-                          <a:lumMod val="20000"/>
-                          <a:lumOff val="80000"/>
-                        </a:schemeClr>
-                      </a:solidFill>
-                    </p:spPr>
-                  </p:pic>
-                </p:oleObj>
-              </mc:Fallback>
-            </mc:AlternateContent>
-          </a:graphicData>
-        </a:graphic>
-      </p:graphicFrame>
-    </p:spTree>
-    <p:extLst>
-      <p:ext uri="{BB962C8B-B14F-4D97-AF65-F5344CB8AC3E}">
-        <p14:creationId xmlns:p14="http://schemas.microsoft.com/office/powerpoint/2010/main" val="2069047387"/>
       </p:ext>
     </p:extLst>
   </p:cSld>
